--- a/assets/pptx/catalog-777.pptx
+++ b/assets/pptx/catalog-777.pptx
@@ -3386,7 +3386,7 @@
                 <a:ea typeface="Ebrima"/>
                 <a:cs typeface="Ebrima"/>
               </a:rPr>
-              <a:t>በቅቶታል ያልቤ አልፈልግም ዳግም (2x)</a:t>
+              <a:t>በቅቶታል ያልቤ አልፈልግም ዳግም 2x</a:t>
             </a:r>
           </a:p>
           <a:p>
@@ -3422,7 +3422,7 @@
                 <a:ea typeface="Ebrima"/>
                 <a:cs typeface="Ebrima"/>
               </a:rPr>
-              <a:t>አልፈልግም ዳግም (እምቢ)</a:t>
+              <a:t>አልፈልግም ዳግም እምቢ</a:t>
             </a:r>
           </a:p>
         </p:txBody>
@@ -3543,7 +3543,7 @@
                 <a:ea typeface="Ebrima"/>
                 <a:cs typeface="Ebrima"/>
               </a:rPr>
-              <a:t>. (2) . አይሎ ነው የመስቀሉ ፍቅር</a:t>
+              <a:t>. 2 . አይሎ ነው የመስቀሉ ፍቅር</a:t>
             </a:r>
           </a:p>
         </p:txBody>
@@ -3628,7 +3628,7 @@
                 <a:ea typeface="Ebrima"/>
                 <a:cs typeface="Ebrima"/>
               </a:rPr>
-              <a:t>በቅቶታል ያልቤ አልፈልግም ዳግም (2x)</a:t>
+              <a:t>በቅቶታል ያልቤ አልፈልግም ዳግም 2x</a:t>
             </a:r>
           </a:p>
           <a:p>
@@ -3664,7 +3664,7 @@
                 <a:ea typeface="Ebrima"/>
                 <a:cs typeface="Ebrima"/>
               </a:rPr>
-              <a:t>አልፈልግም ዳግም (እምቢ)</a:t>
+              <a:t>አልፈልግም ዳግም እምቢ</a:t>
             </a:r>
           </a:p>
         </p:txBody>
@@ -3870,7 +3870,7 @@
                 <a:ea typeface="Ebrima"/>
                 <a:cs typeface="Ebrima"/>
               </a:rPr>
-              <a:t>በቅቶታል ያልቤ አልፈልግም ዳግም (2x)</a:t>
+              <a:t>በቅቶታል ያልቤ አልፈልግም ዳግም 2x</a:t>
             </a:r>
           </a:p>
           <a:p>
@@ -3906,7 +3906,7 @@
                 <a:ea typeface="Ebrima"/>
                 <a:cs typeface="Ebrima"/>
               </a:rPr>
-              <a:t>አልፈልግም ዳግም (እምቢ)</a:t>
+              <a:t>አልፈልግም ዳግም እምቢ</a:t>
             </a:r>
           </a:p>
         </p:txBody>
